--- a/src/ppt-super/assets/tpl-07-loop-flywheel/template.pptx
+++ b/src/ppt-super/assets/tpl-07-loop-flywheel/template.pptx
@@ -3136,7 +3136,14 @@
           <a:bodyPr rtlCol="0" anchor="ctr"/>
           <a:lstStyle/>
           <a:p>
-            <a:pPr algn="ctr"/>
+            <a:pPr algn="ctr">
+              <a:spcBef>
+                <a:spcPts val="0"/>
+              </a:spcBef>
+              <a:spcAft>
+                <a:spcPts val="0"/>
+              </a:spcAft>
+            </a:pPr>
           </a:p>
         </p:txBody>
       </p:sp>
@@ -3166,14 +3173,21 @@
               <a:lnSpc>
                 <a:spcPct val="112000"/>
               </a:lnSpc>
+              <a:spcBef>
+                <a:spcPts val="0"/>
+              </a:spcBef>
+              <a:spcAft>
+                <a:spcPts val="0"/>
+              </a:spcAft>
             </a:pPr>
             <a:r>
-              <a:rPr sz="1400" b="1" i="0">
+              <a:rPr sz="1400" b="1" i="0" lang="zh-CN" altLang="zh-CN">
                 <a:solidFill>
                   <a:srgbClr val="FFFFFF"/>
                 </a:solidFill>
                 <a:latin typeface="Microsoft YaHei"/>
                 <a:ea typeface="Microsoft YaHei"/>
+                <a:cs typeface="Microsoft YaHei"/>
               </a:rPr>
               <a:t>数据飞轮</a:t>
             </a:r>
@@ -3206,14 +3220,21 @@
               <a:lnSpc>
                 <a:spcPct val="112000"/>
               </a:lnSpc>
+              <a:spcBef>
+                <a:spcPts val="0"/>
+              </a:spcBef>
+              <a:spcAft>
+                <a:spcPts val="0"/>
+              </a:spcAft>
             </a:pPr>
             <a:r>
-              <a:rPr sz="2200" b="1" i="0">
+              <a:rPr sz="2200" b="1" i="0" lang="zh-CN" altLang="zh-CN">
                 <a:solidFill>
                   <a:srgbClr val="B90A0A"/>
                 </a:solidFill>
                 <a:latin typeface="Microsoft YaHei"/>
                 <a:ea typeface="Microsoft YaHei"/>
+                <a:cs typeface="Microsoft YaHei"/>
               </a:rPr>
               <a:t>盘古数据飞轮闭环: bad case 回流 14 天→2 天, 评测准确率 +12pp</a:t>
             </a:r>
@@ -3300,7 +3321,14 @@
           <a:bodyPr rtlCol="0" anchor="ctr"/>
           <a:lstStyle/>
           <a:p>
-            <a:pPr algn="ctr"/>
+            <a:pPr algn="ctr">
+              <a:spcBef>
+                <a:spcPts val="0"/>
+              </a:spcBef>
+              <a:spcAft>
+                <a:spcPts val="0"/>
+              </a:spcAft>
+            </a:pPr>
           </a:p>
         </p:txBody>
       </p:sp>
@@ -3330,14 +3358,21 @@
               <a:lnSpc>
                 <a:spcPct val="112000"/>
               </a:lnSpc>
+              <a:spcBef>
+                <a:spcPts val="0"/>
+              </a:spcBef>
+              <a:spcAft>
+                <a:spcPts val="0"/>
+              </a:spcAft>
             </a:pPr>
             <a:r>
-              <a:rPr sz="1600" b="1" i="0">
+              <a:rPr sz="1600" b="1" i="0" lang="zh-CN" altLang="zh-CN">
                 <a:solidFill>
                   <a:srgbClr val="B90A0A"/>
                 </a:solidFill>
                 <a:latin typeface="Microsoft YaHei"/>
                 <a:ea typeface="Microsoft YaHei"/>
+                <a:cs typeface="Microsoft YaHei"/>
               </a:rPr>
               <a:t>模型能力</a:t>
             </a:r>
@@ -3347,14 +3382,21 @@
               <a:lnSpc>
                 <a:spcPct val="112000"/>
               </a:lnSpc>
+              <a:spcBef>
+                <a:spcPts val="0"/>
+              </a:spcBef>
+              <a:spcAft>
+                <a:spcPts val="0"/>
+              </a:spcAft>
             </a:pPr>
             <a:r>
-              <a:rPr sz="1600" b="1" i="0">
+              <a:rPr sz="1600" b="1" i="0" lang="zh-CN" altLang="zh-CN">
                 <a:solidFill>
                   <a:srgbClr val="B90A0A"/>
                 </a:solidFill>
                 <a:latin typeface="Microsoft YaHei"/>
                 <a:ea typeface="Microsoft YaHei"/>
+                <a:cs typeface="Microsoft YaHei"/>
               </a:rPr>
               <a:t>持续进化</a:t>
             </a:r>
@@ -3401,7 +3443,14 @@
           <a:bodyPr rtlCol="0" anchor="ctr"/>
           <a:lstStyle/>
           <a:p>
-            <a:pPr algn="ctr"/>
+            <a:pPr algn="ctr">
+              <a:spcBef>
+                <a:spcPts val="0"/>
+              </a:spcBef>
+              <a:spcAft>
+                <a:spcPts val="0"/>
+              </a:spcAft>
+            </a:pPr>
           </a:p>
         </p:txBody>
       </p:sp>
@@ -3445,7 +3494,14 @@
           <a:bodyPr rtlCol="0" anchor="ctr"/>
           <a:lstStyle/>
           <a:p>
-            <a:pPr algn="ctr"/>
+            <a:pPr algn="ctr">
+              <a:spcBef>
+                <a:spcPts val="0"/>
+              </a:spcBef>
+              <a:spcAft>
+                <a:spcPts val="0"/>
+              </a:spcAft>
+            </a:pPr>
           </a:p>
         </p:txBody>
       </p:sp>
@@ -3457,8 +3513,8 @@
         </p:nvSpPr>
         <p:spPr>
           <a:xfrm>
-            <a:off x="3797300" y="1549400"/>
-            <a:ext cx="241300" cy="241300"/>
+            <a:off x="3797300" y="1532318"/>
+            <a:ext cx="241300" cy="275463"/>
           </a:xfrm>
           <a:prstGeom prst="rect">
             <a:avLst/>
@@ -3475,14 +3531,21 @@
               <a:lnSpc>
                 <a:spcPct val="112000"/>
               </a:lnSpc>
+              <a:spcBef>
+                <a:spcPts val="0"/>
+              </a:spcBef>
+              <a:spcAft>
+                <a:spcPts val="0"/>
+              </a:spcAft>
             </a:pPr>
             <a:r>
-              <a:rPr sz="1600" b="1" i="0">
+              <a:rPr sz="1600" b="1" i="0" lang="zh-CN" altLang="zh-CN">
                 <a:solidFill>
                   <a:srgbClr val="1F4E79"/>
                 </a:solidFill>
                 <a:latin typeface="Microsoft YaHei"/>
                 <a:ea typeface="Microsoft YaHei"/>
+                <a:cs typeface="Microsoft YaHei"/>
               </a:rPr>
               <a:t>1</a:t>
             </a:r>
@@ -3515,14 +3578,21 @@
               <a:lnSpc>
                 <a:spcPct val="112000"/>
               </a:lnSpc>
+              <a:spcBef>
+                <a:spcPts val="0"/>
+              </a:spcBef>
+              <a:spcAft>
+                <a:spcPts val="0"/>
+              </a:spcAft>
             </a:pPr>
             <a:r>
-              <a:rPr sz="1300" b="1" i="0">
+              <a:rPr sz="1300" b="1" i="0" lang="zh-CN" altLang="zh-CN">
                 <a:solidFill>
                   <a:srgbClr val="FFFFFF"/>
                 </a:solidFill>
                 <a:latin typeface="Microsoft YaHei"/>
                 <a:ea typeface="Microsoft YaHei"/>
+                <a:cs typeface="Microsoft YaHei"/>
               </a:rPr>
               <a:t>Step 1</a:t>
             </a:r>
@@ -3571,7 +3641,14 @@
           <a:bodyPr rtlCol="0" anchor="ctr"/>
           <a:lstStyle/>
           <a:p>
-            <a:pPr algn="ctr"/>
+            <a:pPr algn="ctr">
+              <a:spcBef>
+                <a:spcPts val="0"/>
+              </a:spcBef>
+              <a:spcAft>
+                <a:spcPts val="0"/>
+              </a:spcAft>
+            </a:pPr>
           </a:p>
         </p:txBody>
       </p:sp>
@@ -3617,7 +3694,14 @@
           <a:bodyPr rtlCol="0" anchor="ctr"/>
           <a:lstStyle/>
           <a:p>
-            <a:pPr algn="ctr"/>
+            <a:pPr algn="ctr">
+              <a:spcBef>
+                <a:spcPts val="0"/>
+              </a:spcBef>
+              <a:spcAft>
+                <a:spcPts val="0"/>
+              </a:spcAft>
+            </a:pPr>
           </a:p>
         </p:txBody>
       </p:sp>
@@ -3663,7 +3747,14 @@
           <a:bodyPr rtlCol="0" anchor="ctr"/>
           <a:lstStyle/>
           <a:p>
-            <a:pPr algn="ctr"/>
+            <a:pPr algn="ctr">
+              <a:spcBef>
+                <a:spcPts val="0"/>
+              </a:spcBef>
+              <a:spcAft>
+                <a:spcPts val="0"/>
+              </a:spcAft>
+            </a:pPr>
           </a:p>
         </p:txBody>
       </p:sp>
@@ -3707,7 +3798,14 @@
           <a:bodyPr rtlCol="0" anchor="ctr"/>
           <a:lstStyle/>
           <a:p>
-            <a:pPr algn="ctr"/>
+            <a:pPr algn="ctr">
+              <a:spcBef>
+                <a:spcPts val="0"/>
+              </a:spcBef>
+              <a:spcAft>
+                <a:spcPts val="0"/>
+              </a:spcAft>
+            </a:pPr>
           </a:p>
         </p:txBody>
       </p:sp>
@@ -3751,7 +3849,14 @@
           <a:bodyPr rtlCol="0" anchor="ctr"/>
           <a:lstStyle/>
           <a:p>
-            <a:pPr algn="ctr"/>
+            <a:pPr algn="ctr">
+              <a:spcBef>
+                <a:spcPts val="0"/>
+              </a:spcBef>
+              <a:spcAft>
+                <a:spcPts val="0"/>
+              </a:spcAft>
+            </a:pPr>
           </a:p>
         </p:txBody>
       </p:sp>
@@ -3763,8 +3868,8 @@
         </p:nvSpPr>
         <p:spPr>
           <a:xfrm>
-            <a:off x="6527800" y="3467100"/>
-            <a:ext cx="241300" cy="241300"/>
+            <a:off x="6527800" y="3450018"/>
+            <a:ext cx="241300" cy="275463"/>
           </a:xfrm>
           <a:prstGeom prst="rect">
             <a:avLst/>
@@ -3781,14 +3886,21 @@
               <a:lnSpc>
                 <a:spcPct val="112000"/>
               </a:lnSpc>
+              <a:spcBef>
+                <a:spcPts val="0"/>
+              </a:spcBef>
+              <a:spcAft>
+                <a:spcPts val="0"/>
+              </a:spcAft>
             </a:pPr>
             <a:r>
-              <a:rPr sz="1600" b="1" i="0">
+              <a:rPr sz="1600" b="1" i="0" lang="zh-CN" altLang="zh-CN">
                 <a:solidFill>
                   <a:srgbClr val="1F4E79"/>
                 </a:solidFill>
                 <a:latin typeface="Microsoft YaHei"/>
                 <a:ea typeface="Microsoft YaHei"/>
+                <a:cs typeface="Microsoft YaHei"/>
               </a:rPr>
               <a:t>2</a:t>
             </a:r>
@@ -3821,14 +3933,21 @@
               <a:lnSpc>
                 <a:spcPct val="112000"/>
               </a:lnSpc>
+              <a:spcBef>
+                <a:spcPts val="0"/>
+              </a:spcBef>
+              <a:spcAft>
+                <a:spcPts val="0"/>
+              </a:spcAft>
             </a:pPr>
             <a:r>
-              <a:rPr sz="1300" b="1" i="0">
+              <a:rPr sz="1300" b="1" i="0" lang="zh-CN" altLang="zh-CN">
                 <a:solidFill>
                   <a:srgbClr val="FFFFFF"/>
                 </a:solidFill>
                 <a:latin typeface="Microsoft YaHei"/>
                 <a:ea typeface="Microsoft YaHei"/>
+                <a:cs typeface="Microsoft YaHei"/>
               </a:rPr>
               <a:t>Step 2</a:t>
             </a:r>
@@ -3877,7 +3996,14 @@
           <a:bodyPr rtlCol="0" anchor="ctr"/>
           <a:lstStyle/>
           <a:p>
-            <a:pPr algn="ctr"/>
+            <a:pPr algn="ctr">
+              <a:spcBef>
+                <a:spcPts val="0"/>
+              </a:spcBef>
+              <a:spcAft>
+                <a:spcPts val="0"/>
+              </a:spcAft>
+            </a:pPr>
           </a:p>
         </p:txBody>
       </p:sp>
@@ -3923,7 +4049,14 @@
           <a:bodyPr rtlCol="0" anchor="ctr"/>
           <a:lstStyle/>
           <a:p>
-            <a:pPr algn="ctr"/>
+            <a:pPr algn="ctr">
+              <a:spcBef>
+                <a:spcPts val="0"/>
+              </a:spcBef>
+              <a:spcAft>
+                <a:spcPts val="0"/>
+              </a:spcAft>
+            </a:pPr>
           </a:p>
         </p:txBody>
       </p:sp>
@@ -4399,7 +4532,14 @@
           <a:bodyPr rtlCol="0" anchor="ctr"/>
           <a:lstStyle/>
           <a:p>
-            <a:pPr algn="ctr"/>
+            <a:pPr algn="ctr">
+              <a:spcBef>
+                <a:spcPts val="0"/>
+              </a:spcBef>
+              <a:spcAft>
+                <a:spcPts val="0"/>
+              </a:spcAft>
+            </a:pPr>
           </a:p>
         </p:txBody>
       </p:sp>
@@ -4443,7 +4583,14 @@
           <a:bodyPr rtlCol="0" anchor="ctr"/>
           <a:lstStyle/>
           <a:p>
-            <a:pPr algn="ctr"/>
+            <a:pPr algn="ctr">
+              <a:spcBef>
+                <a:spcPts val="0"/>
+              </a:spcBef>
+              <a:spcAft>
+                <a:spcPts val="0"/>
+              </a:spcAft>
+            </a:pPr>
           </a:p>
         </p:txBody>
       </p:sp>
@@ -4455,8 +4602,8 @@
         </p:nvSpPr>
         <p:spPr>
           <a:xfrm>
-            <a:off x="3797300" y="5410200"/>
-            <a:ext cx="241300" cy="241300"/>
+            <a:off x="3797300" y="5393118"/>
+            <a:ext cx="241300" cy="275463"/>
           </a:xfrm>
           <a:prstGeom prst="rect">
             <a:avLst/>
@@ -4473,14 +4620,21 @@
               <a:lnSpc>
                 <a:spcPct val="112000"/>
               </a:lnSpc>
+              <a:spcBef>
+                <a:spcPts val="0"/>
+              </a:spcBef>
+              <a:spcAft>
+                <a:spcPts val="0"/>
+              </a:spcAft>
             </a:pPr>
             <a:r>
-              <a:rPr sz="1600" b="1" i="0">
+              <a:rPr sz="1600" b="1" i="0" lang="zh-CN" altLang="zh-CN">
                 <a:solidFill>
                   <a:srgbClr val="1F4E79"/>
                 </a:solidFill>
                 <a:latin typeface="Microsoft YaHei"/>
                 <a:ea typeface="Microsoft YaHei"/>
+                <a:cs typeface="Microsoft YaHei"/>
               </a:rPr>
               <a:t>3</a:t>
             </a:r>
@@ -4513,14 +4667,21 @@
               <a:lnSpc>
                 <a:spcPct val="112000"/>
               </a:lnSpc>
+              <a:spcBef>
+                <a:spcPts val="0"/>
+              </a:spcBef>
+              <a:spcAft>
+                <a:spcPts val="0"/>
+              </a:spcAft>
             </a:pPr>
             <a:r>
-              <a:rPr sz="1300" b="1" i="0">
+              <a:rPr sz="1300" b="1" i="0" lang="zh-CN" altLang="zh-CN">
                 <a:solidFill>
                   <a:srgbClr val="FFFFFF"/>
                 </a:solidFill>
                 <a:latin typeface="Microsoft YaHei"/>
                 <a:ea typeface="Microsoft YaHei"/>
+                <a:cs typeface="Microsoft YaHei"/>
               </a:rPr>
               <a:t>Step 3</a:t>
             </a:r>
@@ -4535,8 +4696,8 @@
         </p:nvSpPr>
         <p:spPr>
           <a:xfrm>
-            <a:off x="4660900" y="5378450"/>
-            <a:ext cx="279400" cy="279400"/>
+            <a:off x="4518025" y="5301678"/>
+            <a:ext cx="565150" cy="432943"/>
           </a:xfrm>
           <a:prstGeom prst="rect">
             <a:avLst/>
@@ -4553,14 +4714,21 @@
               <a:lnSpc>
                 <a:spcPct val="112000"/>
               </a:lnSpc>
+              <a:spcBef>
+                <a:spcPts val="0"/>
+              </a:spcBef>
+              <a:spcAft>
+                <a:spcPts val="0"/>
+              </a:spcAft>
             </a:pPr>
             <a:r>
-              <a:rPr sz="2600" b="1" i="0">
+              <a:rPr sz="2600" b="1" i="0" lang="zh-CN" altLang="zh-CN">
                 <a:solidFill>
                   <a:srgbClr val="FFFFFF"/>
                 </a:solidFill>
                 <a:latin typeface="Microsoft YaHei"/>
                 <a:ea typeface="Microsoft YaHei"/>
+                <a:cs typeface="Microsoft YaHei"/>
               </a:rPr>
               <a:t>⚡</a:t>
             </a:r>
@@ -4607,7 +4775,14 @@
           <a:bodyPr rtlCol="0" anchor="ctr"/>
           <a:lstStyle/>
           <a:p>
-            <a:pPr algn="ctr"/>
+            <a:pPr algn="ctr">
+              <a:spcBef>
+                <a:spcPts val="0"/>
+              </a:spcBef>
+              <a:spcAft>
+                <a:spcPts val="0"/>
+              </a:spcAft>
+            </a:pPr>
           </a:p>
         </p:txBody>
       </p:sp>
@@ -4651,7 +4826,14 @@
           <a:bodyPr rtlCol="0" anchor="ctr"/>
           <a:lstStyle/>
           <a:p>
-            <a:pPr algn="ctr"/>
+            <a:pPr algn="ctr">
+              <a:spcBef>
+                <a:spcPts val="0"/>
+              </a:spcBef>
+              <a:spcAft>
+                <a:spcPts val="0"/>
+              </a:spcAft>
+            </a:pPr>
           </a:p>
         </p:txBody>
       </p:sp>
@@ -4663,8 +4845,8 @@
         </p:nvSpPr>
         <p:spPr>
           <a:xfrm>
-            <a:off x="1066800" y="3467100"/>
-            <a:ext cx="241300" cy="241300"/>
+            <a:off x="1066800" y="3450018"/>
+            <a:ext cx="241300" cy="275463"/>
           </a:xfrm>
           <a:prstGeom prst="rect">
             <a:avLst/>
@@ -4681,14 +4863,21 @@
               <a:lnSpc>
                 <a:spcPct val="112000"/>
               </a:lnSpc>
+              <a:spcBef>
+                <a:spcPts val="0"/>
+              </a:spcBef>
+              <a:spcAft>
+                <a:spcPts val="0"/>
+              </a:spcAft>
             </a:pPr>
             <a:r>
-              <a:rPr sz="1600" b="1" i="0">
+              <a:rPr sz="1600" b="1" i="0" lang="zh-CN" altLang="zh-CN">
                 <a:solidFill>
                   <a:srgbClr val="1F4E79"/>
                 </a:solidFill>
                 <a:latin typeface="Microsoft YaHei"/>
                 <a:ea typeface="Microsoft YaHei"/>
+                <a:cs typeface="Microsoft YaHei"/>
               </a:rPr>
               <a:t>4</a:t>
             </a:r>
@@ -4721,14 +4910,21 @@
               <a:lnSpc>
                 <a:spcPct val="112000"/>
               </a:lnSpc>
+              <a:spcBef>
+                <a:spcPts val="0"/>
+              </a:spcBef>
+              <a:spcAft>
+                <a:spcPts val="0"/>
+              </a:spcAft>
             </a:pPr>
             <a:r>
-              <a:rPr sz="1300" b="1" i="0">
+              <a:rPr sz="1300" b="1" i="0" lang="zh-CN" altLang="zh-CN">
                 <a:solidFill>
                   <a:srgbClr val="FFFFFF"/>
                 </a:solidFill>
                 <a:latin typeface="Microsoft YaHei"/>
                 <a:ea typeface="Microsoft YaHei"/>
+                <a:cs typeface="Microsoft YaHei"/>
               </a:rPr>
               <a:t>Step 4</a:t>
             </a:r>
@@ -5034,7 +5230,14 @@
           <a:bodyPr rtlCol="0" anchor="ctr"/>
           <a:lstStyle/>
           <a:p>
-            <a:pPr algn="ctr"/>
+            <a:pPr algn="ctr">
+              <a:spcBef>
+                <a:spcPts val="0"/>
+              </a:spcBef>
+              <a:spcAft>
+                <a:spcPts val="0"/>
+              </a:spcAft>
+            </a:pPr>
           </a:p>
         </p:txBody>
       </p:sp>
@@ -5046,8 +5249,8 @@
         </p:nvSpPr>
         <p:spPr>
           <a:xfrm>
-            <a:off x="469899" y="920750"/>
-            <a:ext cx="190500" cy="190500"/>
+            <a:off x="430211" y="886206"/>
+            <a:ext cx="269875" cy="259588"/>
           </a:xfrm>
           <a:prstGeom prst="rect">
             <a:avLst/>
@@ -5064,14 +5267,21 @@
               <a:lnSpc>
                 <a:spcPct val="112000"/>
               </a:lnSpc>
+              <a:spcBef>
+                <a:spcPts val="0"/>
+              </a:spcBef>
+              <a:spcAft>
+                <a:spcPts val="0"/>
+              </a:spcAft>
             </a:pPr>
             <a:r>
-              <a:rPr sz="1500" b="1" i="0">
+              <a:rPr sz="1500" b="1" i="0" lang="zh-CN" altLang="zh-CN">
                 <a:solidFill>
                   <a:srgbClr val="B90A0A"/>
                 </a:solidFill>
                 <a:latin typeface="Microsoft YaHei"/>
                 <a:ea typeface="Microsoft YaHei"/>
+                <a:cs typeface="Microsoft YaHei"/>
               </a:rPr>
               <a:t>①</a:t>
             </a:r>
@@ -5104,14 +5314,21 @@
               <a:lnSpc>
                 <a:spcPct val="112000"/>
               </a:lnSpc>
+              <a:spcBef>
+                <a:spcPts val="0"/>
+              </a:spcBef>
+              <a:spcAft>
+                <a:spcPts val="0"/>
+              </a:spcAft>
             </a:pPr>
             <a:r>
-              <a:rPr sz="1400" b="1" i="0">
+              <a:rPr sz="1400" b="1" i="0" lang="zh-CN" altLang="zh-CN">
                 <a:solidFill>
                   <a:srgbClr val="1F4E79"/>
                 </a:solidFill>
                 <a:latin typeface="Microsoft YaHei"/>
                 <a:ea typeface="Microsoft YaHei"/>
+                <a:cs typeface="Microsoft YaHei"/>
               </a:rPr>
               <a:t>数据采集</a:t>
             </a:r>
@@ -5144,14 +5361,21 @@
               <a:lnSpc>
                 <a:spcPct val="130000"/>
               </a:lnSpc>
+              <a:spcBef>
+                <a:spcPts val="0"/>
+              </a:spcBef>
+              <a:spcAft>
+                <a:spcPts val="0"/>
+              </a:spcAft>
             </a:pPr>
             <a:r>
-              <a:rPr sz="1050" b="0" i="0">
+              <a:rPr sz="1050" b="0" i="0" lang="zh-CN" altLang="zh-CN">
                 <a:solidFill>
                   <a:srgbClr val="262626"/>
                 </a:solidFill>
                 <a:latin typeface="Microsoft YaHei"/>
                 <a:ea typeface="Microsoft YaHei"/>
+                <a:cs typeface="Microsoft YaHei"/>
               </a:rPr>
               <a:t>全网公开语料与行业反馈双通道持续汇聚, 日增 2.1B tokens 经自动去重清洗后入仓, 敏感数据全程自动脱敏, 合规检查通过率保持 100%。</a:t>
             </a:r>
@@ -5200,7 +5424,14 @@
           <a:bodyPr rtlCol="0" anchor="ctr"/>
           <a:lstStyle/>
           <a:p>
-            <a:pPr algn="ctr"/>
+            <a:pPr algn="ctr">
+              <a:spcBef>
+                <a:spcPts val="0"/>
+              </a:spcBef>
+              <a:spcAft>
+                <a:spcPts val="0"/>
+              </a:spcAft>
+            </a:pPr>
           </a:p>
         </p:txBody>
       </p:sp>
@@ -5212,8 +5443,8 @@
         </p:nvSpPr>
         <p:spPr>
           <a:xfrm>
-            <a:off x="6248400" y="920750"/>
-            <a:ext cx="190500" cy="190500"/>
+            <a:off x="6208712" y="886206"/>
+            <a:ext cx="269875" cy="259588"/>
           </a:xfrm>
           <a:prstGeom prst="rect">
             <a:avLst/>
@@ -5230,14 +5461,21 @@
               <a:lnSpc>
                 <a:spcPct val="112000"/>
               </a:lnSpc>
+              <a:spcBef>
+                <a:spcPts val="0"/>
+              </a:spcBef>
+              <a:spcAft>
+                <a:spcPts val="0"/>
+              </a:spcAft>
             </a:pPr>
             <a:r>
-              <a:rPr sz="1500" b="1" i="0">
+              <a:rPr sz="1500" b="1" i="0" lang="zh-CN" altLang="zh-CN">
                 <a:solidFill>
                   <a:srgbClr val="B90A0A"/>
                 </a:solidFill>
                 <a:latin typeface="Microsoft YaHei"/>
                 <a:ea typeface="Microsoft YaHei"/>
+                <a:cs typeface="Microsoft YaHei"/>
               </a:rPr>
               <a:t>②</a:t>
             </a:r>
@@ -5270,14 +5508,21 @@
               <a:lnSpc>
                 <a:spcPct val="112000"/>
               </a:lnSpc>
+              <a:spcBef>
+                <a:spcPts val="0"/>
+              </a:spcBef>
+              <a:spcAft>
+                <a:spcPts val="0"/>
+              </a:spcAft>
             </a:pPr>
             <a:r>
-              <a:rPr sz="1400" b="1" i="0">
+              <a:rPr sz="1400" b="1" i="0" lang="zh-CN" altLang="zh-CN">
                 <a:solidFill>
                   <a:srgbClr val="1F4E79"/>
                 </a:solidFill>
                 <a:latin typeface="Microsoft YaHei"/>
                 <a:ea typeface="Microsoft YaHei"/>
+                <a:cs typeface="Microsoft YaHei"/>
               </a:rPr>
               <a:t>模型训练</a:t>
             </a:r>
@@ -5310,14 +5555,21 @@
               <a:lnSpc>
                 <a:spcPct val="130000"/>
               </a:lnSpc>
+              <a:spcBef>
+                <a:spcPts val="0"/>
+              </a:spcBef>
+              <a:spcAft>
+                <a:spcPts val="0"/>
+              </a:spcAft>
             </a:pPr>
             <a:r>
-              <a:rPr sz="1050" b="0" i="0">
+              <a:rPr sz="1050" b="0" i="0" lang="zh-CN" altLang="zh-CN">
                 <a:solidFill>
                   <a:srgbClr val="262626"/>
                 </a:solidFill>
                 <a:latin typeface="Microsoft YaHei"/>
                 <a:ea typeface="Microsoft YaHei"/>
+                <a:cs typeface="Microsoft YaHei"/>
               </a:rPr>
               <a:t>基于昇腾 910B 千卡集群开展增量训练, MFU 稳定在 58%, 支撑模型版本周级迭代; 断点续训机制保障千卡任务长周期稳定运行。</a:t>
             </a:r>
@@ -5366,7 +5618,14 @@
           <a:bodyPr rtlCol="0" anchor="ctr"/>
           <a:lstStyle/>
           <a:p>
-            <a:pPr algn="ctr"/>
+            <a:pPr algn="ctr">
+              <a:spcBef>
+                <a:spcPts val="0"/>
+              </a:spcBef>
+              <a:spcAft>
+                <a:spcPts val="0"/>
+              </a:spcAft>
+            </a:pPr>
           </a:p>
         </p:txBody>
       </p:sp>
@@ -5378,8 +5637,8 @@
         </p:nvSpPr>
         <p:spPr>
           <a:xfrm>
-            <a:off x="6248400" y="5372100"/>
-            <a:ext cx="190500" cy="190500"/>
+            <a:off x="6208712" y="5337556"/>
+            <a:ext cx="269875" cy="259588"/>
           </a:xfrm>
           <a:prstGeom prst="rect">
             <a:avLst/>
@@ -5396,14 +5655,21 @@
               <a:lnSpc>
                 <a:spcPct val="112000"/>
               </a:lnSpc>
+              <a:spcBef>
+                <a:spcPts val="0"/>
+              </a:spcBef>
+              <a:spcAft>
+                <a:spcPts val="0"/>
+              </a:spcAft>
             </a:pPr>
             <a:r>
-              <a:rPr sz="1500" b="1" i="0">
+              <a:rPr sz="1500" b="1" i="0" lang="zh-CN" altLang="zh-CN">
                 <a:solidFill>
                   <a:srgbClr val="B90A0A"/>
                 </a:solidFill>
                 <a:latin typeface="Microsoft YaHei"/>
                 <a:ea typeface="Microsoft YaHei"/>
+                <a:cs typeface="Microsoft YaHei"/>
               </a:rPr>
               <a:t>③</a:t>
             </a:r>
@@ -5436,14 +5702,21 @@
               <a:lnSpc>
                 <a:spcPct val="112000"/>
               </a:lnSpc>
+              <a:spcBef>
+                <a:spcPts val="0"/>
+              </a:spcBef>
+              <a:spcAft>
+                <a:spcPts val="0"/>
+              </a:spcAft>
             </a:pPr>
             <a:r>
-              <a:rPr sz="1400" b="1" i="0">
+              <a:rPr sz="1400" b="1" i="0" lang="zh-CN" altLang="zh-CN">
                 <a:solidFill>
                   <a:srgbClr val="1F4E79"/>
                 </a:solidFill>
                 <a:latin typeface="Microsoft YaHei"/>
                 <a:ea typeface="Microsoft YaHei"/>
+                <a:cs typeface="Microsoft YaHei"/>
               </a:rPr>
               <a:t>在线推理</a:t>
             </a:r>
@@ -5476,14 +5749,21 @@
               <a:lnSpc>
                 <a:spcPct val="130000"/>
               </a:lnSpc>
+              <a:spcBef>
+                <a:spcPts val="0"/>
+              </a:spcBef>
+              <a:spcAft>
+                <a:spcPts val="0"/>
+              </a:spcAft>
             </a:pPr>
             <a:r>
-              <a:rPr sz="1050" b="0" i="0">
+              <a:rPr sz="1050" b="0" i="0" lang="zh-CN" altLang="zh-CN">
                 <a:solidFill>
                   <a:srgbClr val="262626"/>
                 </a:solidFill>
                 <a:latin typeface="Microsoft YaHei"/>
                 <a:ea typeface="Microsoft YaHei"/>
+                <a:cs typeface="Microsoft YaHei"/>
               </a:rPr>
               <a:t>推理服务日均调用达 3.2 亿次, P99 时延稳定控制在 800ms 以内; 动态批处理调度使整体吞吐提升 2.3 倍, 高峰期供给平稳无降级。</a:t>
             </a:r>
@@ -5532,7 +5812,14 @@
           <a:bodyPr rtlCol="0" anchor="ctr"/>
           <a:lstStyle/>
           <a:p>
-            <a:pPr algn="ctr"/>
+            <a:pPr algn="ctr">
+              <a:spcBef>
+                <a:spcPts val="0"/>
+              </a:spcBef>
+              <a:spcAft>
+                <a:spcPts val="0"/>
+              </a:spcAft>
+            </a:pPr>
           </a:p>
         </p:txBody>
       </p:sp>
@@ -5544,8 +5831,8 @@
         </p:nvSpPr>
         <p:spPr>
           <a:xfrm>
-            <a:off x="469899" y="5372100"/>
-            <a:ext cx="190500" cy="190500"/>
+            <a:off x="430211" y="5337556"/>
+            <a:ext cx="269875" cy="259588"/>
           </a:xfrm>
           <a:prstGeom prst="rect">
             <a:avLst/>
@@ -5562,14 +5849,21 @@
               <a:lnSpc>
                 <a:spcPct val="112000"/>
               </a:lnSpc>
+              <a:spcBef>
+                <a:spcPts val="0"/>
+              </a:spcBef>
+              <a:spcAft>
+                <a:spcPts val="0"/>
+              </a:spcAft>
             </a:pPr>
             <a:r>
-              <a:rPr sz="1500" b="1" i="0">
+              <a:rPr sz="1500" b="1" i="0" lang="zh-CN" altLang="zh-CN">
                 <a:solidFill>
                   <a:srgbClr val="B90A0A"/>
                 </a:solidFill>
                 <a:latin typeface="Microsoft YaHei"/>
                 <a:ea typeface="Microsoft YaHei"/>
+                <a:cs typeface="Microsoft YaHei"/>
               </a:rPr>
               <a:t>④</a:t>
             </a:r>
@@ -5602,14 +5896,21 @@
               <a:lnSpc>
                 <a:spcPct val="112000"/>
               </a:lnSpc>
+              <a:spcBef>
+                <a:spcPts val="0"/>
+              </a:spcBef>
+              <a:spcAft>
+                <a:spcPts val="0"/>
+              </a:spcAft>
             </a:pPr>
             <a:r>
-              <a:rPr sz="1400" b="1" i="0">
+              <a:rPr sz="1400" b="1" i="0" lang="zh-CN" altLang="zh-CN">
                 <a:solidFill>
                   <a:srgbClr val="1F4E79"/>
                 </a:solidFill>
                 <a:latin typeface="Microsoft YaHei"/>
                 <a:ea typeface="Microsoft YaHei"/>
+                <a:cs typeface="Microsoft YaHei"/>
               </a:rPr>
               <a:t>反馈评估</a:t>
             </a:r>
@@ -5642,14 +5943,21 @@
               <a:lnSpc>
                 <a:spcPct val="130000"/>
               </a:lnSpc>
+              <a:spcBef>
+                <a:spcPts val="0"/>
+              </a:spcBef>
+              <a:spcAft>
+                <a:spcPts val="0"/>
+              </a:spcAft>
             </a:pPr>
             <a:r>
-              <a:rPr sz="1050" b="0" i="0">
+              <a:rPr sz="1050" b="0" i="0" lang="zh-CN" altLang="zh-CN">
                 <a:solidFill>
                   <a:srgbClr val="262626"/>
                 </a:solidFill>
                 <a:latin typeface="Microsoft YaHei"/>
                 <a:ea typeface="Microsoft YaHei"/>
+                <a:cs typeface="Microsoft YaHei"/>
               </a:rPr>
               <a:t>线上 bad case 自动回流标注队列, 按 12 域评测集持续追踪 Top1 准确率; 人工抽检采用双盲复核, 与自动评估一致率达 95%。</a:t>
             </a:r>
@@ -5847,7 +6155,14 @@
           <a:bodyPr rtlCol="0" anchor="ctr"/>
           <a:lstStyle/>
           <a:p>
-            <a:pPr algn="ctr"/>
+            <a:pPr algn="ctr">
+              <a:spcBef>
+                <a:spcPts val="0"/>
+              </a:spcBef>
+              <a:spcAft>
+                <a:spcPts val="0"/>
+              </a:spcAft>
+            </a:pPr>
           </a:p>
         </p:txBody>
       </p:sp>
@@ -5859,8 +6174,8 @@
         </p:nvSpPr>
         <p:spPr>
           <a:xfrm>
-            <a:off x="635000" y="2413000"/>
-            <a:ext cx="1397000" cy="139700"/>
+            <a:off x="635000" y="2392616"/>
+            <a:ext cx="1397000" cy="180467"/>
           </a:xfrm>
           <a:prstGeom prst="rect">
             <a:avLst/>
@@ -5877,14 +6192,21 @@
               <a:lnSpc>
                 <a:spcPct val="112000"/>
               </a:lnSpc>
+              <a:spcBef>
+                <a:spcPts val="0"/>
+              </a:spcBef>
+              <a:spcAft>
+                <a:spcPts val="0"/>
+              </a:spcAft>
             </a:pPr>
             <a:r>
-              <a:rPr sz="1000" b="1" i="0">
+              <a:rPr sz="1000" b="1" i="0" lang="zh-CN" altLang="zh-CN">
                 <a:solidFill>
                   <a:srgbClr val="B90A0A"/>
                 </a:solidFill>
                 <a:latin typeface="Microsoft YaHei"/>
                 <a:ea typeface="Microsoft YaHei"/>
+                <a:cs typeface="Microsoft YaHei"/>
               </a:rPr>
               <a:t>④ → ①</a:t>
             </a:r>
@@ -5899,8 +6221,8 @@
         </p:nvSpPr>
         <p:spPr>
           <a:xfrm>
-            <a:off x="635000" y="2552700"/>
-            <a:ext cx="1397000" cy="317500"/>
+            <a:off x="635000" y="2535872"/>
+            <a:ext cx="1397000" cy="351155"/>
           </a:xfrm>
           <a:prstGeom prst="rect">
             <a:avLst/>
@@ -5917,14 +6239,21 @@
               <a:lnSpc>
                 <a:spcPct val="112000"/>
               </a:lnSpc>
+              <a:spcBef>
+                <a:spcPts val="0"/>
+              </a:spcBef>
+              <a:spcAft>
+                <a:spcPts val="0"/>
+              </a:spcAft>
             </a:pPr>
             <a:r>
-              <a:rPr sz="1000" b="0" i="0">
+              <a:rPr sz="1000" b="0" i="0" lang="zh-CN" altLang="zh-CN">
                 <a:solidFill>
                   <a:srgbClr val="595959"/>
                 </a:solidFill>
                 <a:latin typeface="Microsoft YaHei"/>
                 <a:ea typeface="Microsoft YaHei"/>
+                <a:cs typeface="Microsoft YaHei"/>
               </a:rPr>
               <a:t>bad case 2 天内回流标注队列</a:t>
             </a:r>
@@ -5974,7 +6303,14 @@
           <a:bodyPr rtlCol="0" anchor="ctr"/>
           <a:lstStyle/>
           <a:p>
-            <a:pPr algn="ctr"/>
+            <a:pPr algn="ctr">
+              <a:spcBef>
+                <a:spcPts val="0"/>
+              </a:spcBef>
+              <a:spcAft>
+                <a:spcPts val="0"/>
+              </a:spcAft>
+            </a:pPr>
           </a:p>
         </p:txBody>
       </p:sp>
@@ -5986,8 +6322,8 @@
         </p:nvSpPr>
         <p:spPr>
           <a:xfrm>
-            <a:off x="7112000" y="2413000"/>
-            <a:ext cx="1397000" cy="139700"/>
+            <a:off x="7112000" y="2392616"/>
+            <a:ext cx="1397000" cy="180467"/>
           </a:xfrm>
           <a:prstGeom prst="rect">
             <a:avLst/>
@@ -6004,14 +6340,21 @@
               <a:lnSpc>
                 <a:spcPct val="112000"/>
               </a:lnSpc>
+              <a:spcBef>
+                <a:spcPts val="0"/>
+              </a:spcBef>
+              <a:spcAft>
+                <a:spcPts val="0"/>
+              </a:spcAft>
             </a:pPr>
             <a:r>
-              <a:rPr sz="1000" b="1" i="0">
+              <a:rPr sz="1000" b="1" i="0" lang="zh-CN" altLang="zh-CN">
                 <a:solidFill>
                   <a:srgbClr val="B90A0A"/>
                 </a:solidFill>
                 <a:latin typeface="Microsoft YaHei"/>
                 <a:ea typeface="Microsoft YaHei"/>
+                <a:cs typeface="Microsoft YaHei"/>
               </a:rPr>
               <a:t>① → ②</a:t>
             </a:r>
@@ -6026,8 +6369,8 @@
         </p:nvSpPr>
         <p:spPr>
           <a:xfrm>
-            <a:off x="7112000" y="2552700"/>
-            <a:ext cx="1397000" cy="317500"/>
+            <a:off x="7112000" y="2535872"/>
+            <a:ext cx="1397000" cy="351155"/>
           </a:xfrm>
           <a:prstGeom prst="rect">
             <a:avLst/>
@@ -6044,14 +6387,21 @@
               <a:lnSpc>
                 <a:spcPct val="112000"/>
               </a:lnSpc>
+              <a:spcBef>
+                <a:spcPts val="0"/>
+              </a:spcBef>
+              <a:spcAft>
+                <a:spcPts val="0"/>
+              </a:spcAft>
             </a:pPr>
             <a:r>
-              <a:rPr sz="1000" b="0" i="0">
+              <a:rPr sz="1000" b="0" i="0" lang="zh-CN" altLang="zh-CN">
                 <a:solidFill>
                   <a:srgbClr val="595959"/>
                 </a:solidFill>
                 <a:latin typeface="Microsoft YaHei"/>
                 <a:ea typeface="Microsoft YaHei"/>
+                <a:cs typeface="Microsoft YaHei"/>
               </a:rPr>
               <a:t>清洗语料日增 2.1B tokens 入仓</a:t>
             </a:r>
@@ -6101,7 +6451,14 @@
           <a:bodyPr rtlCol="0" anchor="ctr"/>
           <a:lstStyle/>
           <a:p>
-            <a:pPr algn="ctr"/>
+            <a:pPr algn="ctr">
+              <a:spcBef>
+                <a:spcPts val="0"/>
+              </a:spcBef>
+              <a:spcAft>
+                <a:spcPts val="0"/>
+              </a:spcAft>
+            </a:pPr>
           </a:p>
         </p:txBody>
       </p:sp>
@@ -6113,8 +6470,8 @@
         </p:nvSpPr>
         <p:spPr>
           <a:xfrm>
-            <a:off x="7112000" y="4292600"/>
-            <a:ext cx="1397000" cy="139700"/>
+            <a:off x="7112000" y="4272216"/>
+            <a:ext cx="1397000" cy="180467"/>
           </a:xfrm>
           <a:prstGeom prst="rect">
             <a:avLst/>
@@ -6131,14 +6488,21 @@
               <a:lnSpc>
                 <a:spcPct val="112000"/>
               </a:lnSpc>
+              <a:spcBef>
+                <a:spcPts val="0"/>
+              </a:spcBef>
+              <a:spcAft>
+                <a:spcPts val="0"/>
+              </a:spcAft>
             </a:pPr>
             <a:r>
-              <a:rPr sz="1000" b="1" i="0">
+              <a:rPr sz="1000" b="1" i="0" lang="zh-CN" altLang="zh-CN">
                 <a:solidFill>
                   <a:srgbClr val="B90A0A"/>
                 </a:solidFill>
                 <a:latin typeface="Microsoft YaHei"/>
                 <a:ea typeface="Microsoft YaHei"/>
+                <a:cs typeface="Microsoft YaHei"/>
               </a:rPr>
               <a:t>② → ③</a:t>
             </a:r>
@@ -6153,8 +6517,8 @@
         </p:nvSpPr>
         <p:spPr>
           <a:xfrm>
-            <a:off x="7112000" y="4432300"/>
-            <a:ext cx="1397000" cy="317500"/>
+            <a:off x="7112000" y="4415472"/>
+            <a:ext cx="1397000" cy="351155"/>
           </a:xfrm>
           <a:prstGeom prst="rect">
             <a:avLst/>
@@ -6171,14 +6535,21 @@
               <a:lnSpc>
                 <a:spcPct val="112000"/>
               </a:lnSpc>
+              <a:spcBef>
+                <a:spcPts val="0"/>
+              </a:spcBef>
+              <a:spcAft>
+                <a:spcPts val="0"/>
+              </a:spcAft>
             </a:pPr>
             <a:r>
-              <a:rPr sz="1000" b="0" i="0">
+              <a:rPr sz="1000" b="0" i="0" lang="zh-CN" altLang="zh-CN">
                 <a:solidFill>
                   <a:srgbClr val="595959"/>
                 </a:solidFill>
                 <a:latin typeface="Microsoft YaHei"/>
                 <a:ea typeface="Microsoft YaHei"/>
+                <a:cs typeface="Microsoft YaHei"/>
               </a:rPr>
               <a:t>模型版本周级发布推送推理平面</a:t>
             </a:r>
@@ -6228,7 +6599,14 @@
           <a:bodyPr rtlCol="0" anchor="ctr"/>
           <a:lstStyle/>
           <a:p>
-            <a:pPr algn="ctr"/>
+            <a:pPr algn="ctr">
+              <a:spcBef>
+                <a:spcPts val="0"/>
+              </a:spcBef>
+              <a:spcAft>
+                <a:spcPts val="0"/>
+              </a:spcAft>
+            </a:pPr>
           </a:p>
         </p:txBody>
       </p:sp>
@@ -6240,8 +6618,8 @@
         </p:nvSpPr>
         <p:spPr>
           <a:xfrm>
-            <a:off x="635000" y="4292600"/>
-            <a:ext cx="1397000" cy="139700"/>
+            <a:off x="635000" y="4272216"/>
+            <a:ext cx="1397000" cy="180467"/>
           </a:xfrm>
           <a:prstGeom prst="rect">
             <a:avLst/>
@@ -6258,14 +6636,21 @@
               <a:lnSpc>
                 <a:spcPct val="112000"/>
               </a:lnSpc>
+              <a:spcBef>
+                <a:spcPts val="0"/>
+              </a:spcBef>
+              <a:spcAft>
+                <a:spcPts val="0"/>
+              </a:spcAft>
             </a:pPr>
             <a:r>
-              <a:rPr sz="1000" b="1" i="0">
+              <a:rPr sz="1000" b="1" i="0" lang="zh-CN" altLang="zh-CN">
                 <a:solidFill>
                   <a:srgbClr val="B90A0A"/>
                 </a:solidFill>
                 <a:latin typeface="Microsoft YaHei"/>
                 <a:ea typeface="Microsoft YaHei"/>
+                <a:cs typeface="Microsoft YaHei"/>
               </a:rPr>
               <a:t>③ → ④</a:t>
             </a:r>
@@ -6280,8 +6665,8 @@
         </p:nvSpPr>
         <p:spPr>
           <a:xfrm>
-            <a:off x="635000" y="4432300"/>
-            <a:ext cx="1397000" cy="317500"/>
+            <a:off x="635000" y="4415472"/>
+            <a:ext cx="1397000" cy="351155"/>
           </a:xfrm>
           <a:prstGeom prst="rect">
             <a:avLst/>
@@ -6298,14 +6683,21 @@
               <a:lnSpc>
                 <a:spcPct val="112000"/>
               </a:lnSpc>
+              <a:spcBef>
+                <a:spcPts val="0"/>
+              </a:spcBef>
+              <a:spcAft>
+                <a:spcPts val="0"/>
+              </a:spcAft>
             </a:pPr>
             <a:r>
-              <a:rPr sz="1000" b="0" i="0">
+              <a:rPr sz="1000" b="0" i="0" lang="zh-CN" altLang="zh-CN">
                 <a:solidFill>
                   <a:srgbClr val="595959"/>
                 </a:solidFill>
                 <a:latin typeface="Microsoft YaHei"/>
                 <a:ea typeface="Microsoft YaHei"/>
+                <a:cs typeface="Microsoft YaHei"/>
               </a:rPr>
               <a:t>3.2 亿次调用日志沉淀回数据湖</a:t>
             </a:r>
@@ -6354,7 +6746,14 @@
           <a:bodyPr rtlCol="0" anchor="ctr"/>
           <a:lstStyle/>
           <a:p>
-            <a:pPr algn="ctr"/>
+            <a:pPr algn="ctr">
+              <a:spcBef>
+                <a:spcPts val="0"/>
+              </a:spcBef>
+              <a:spcAft>
+                <a:spcPts val="0"/>
+              </a:spcAft>
+            </a:pPr>
           </a:p>
         </p:txBody>
       </p:sp>
@@ -6398,7 +6797,14 @@
           <a:bodyPr rtlCol="0" anchor="ctr"/>
           <a:lstStyle/>
           <a:p>
-            <a:pPr algn="ctr"/>
+            <a:pPr algn="ctr">
+              <a:spcBef>
+                <a:spcPts val="0"/>
+              </a:spcBef>
+              <a:spcAft>
+                <a:spcPts val="0"/>
+              </a:spcAft>
+            </a:pPr>
           </a:p>
         </p:txBody>
       </p:sp>
@@ -6442,7 +6848,14 @@
           <a:bodyPr rtlCol="0" anchor="ctr"/>
           <a:lstStyle/>
           <a:p>
-            <a:pPr algn="ctr"/>
+            <a:pPr algn="ctr">
+              <a:spcBef>
+                <a:spcPts val="0"/>
+              </a:spcBef>
+              <a:spcAft>
+                <a:spcPts val="0"/>
+              </a:spcAft>
+            </a:pPr>
           </a:p>
         </p:txBody>
       </p:sp>
@@ -6472,14 +6885,21 @@
               <a:lnSpc>
                 <a:spcPct val="112000"/>
               </a:lnSpc>
+              <a:spcBef>
+                <a:spcPts val="0"/>
+              </a:spcBef>
+              <a:spcAft>
+                <a:spcPts val="0"/>
+              </a:spcAft>
             </a:pPr>
             <a:r>
-              <a:rPr sz="1500" b="1" i="0">
+              <a:rPr sz="1500" b="1" i="0" lang="zh-CN" altLang="zh-CN">
                 <a:solidFill>
                   <a:srgbClr val="262626"/>
                 </a:solidFill>
                 <a:latin typeface="Microsoft YaHei"/>
                 <a:ea typeface="Microsoft YaHei"/>
+                <a:cs typeface="Microsoft YaHei"/>
               </a:rPr>
               <a:t>飞轮效应</a:t>
             </a:r>
@@ -6512,14 +6932,21 @@
               <a:lnSpc>
                 <a:spcPct val="125000"/>
               </a:lnSpc>
+              <a:spcBef>
+                <a:spcPts val="0"/>
+              </a:spcBef>
+              <a:spcAft>
+                <a:spcPts val="0"/>
+              </a:spcAft>
             </a:pPr>
             <a:r>
-              <a:rPr sz="1150" b="0" i="0">
+              <a:rPr sz="1150" b="0" i="0" lang="zh-CN" altLang="zh-CN">
                 <a:solidFill>
                   <a:srgbClr val="262626"/>
                 </a:solidFill>
                 <a:latin typeface="Microsoft YaHei"/>
                 <a:ea typeface="Microsoft YaHei"/>
+                <a:cs typeface="Microsoft YaHei"/>
               </a:rPr>
               <a:t>• 数据越多→模型越准→调用越多, 正循环已形成</a:t>
             </a:r>
@@ -6529,14 +6956,21 @@
               <a:lnSpc>
                 <a:spcPct val="125000"/>
               </a:lnSpc>
+              <a:spcBef>
+                <a:spcPts val="0"/>
+              </a:spcBef>
+              <a:spcAft>
+                <a:spcPts val="0"/>
+              </a:spcAft>
             </a:pPr>
             <a:r>
-              <a:rPr sz="1150" b="0" i="0">
+              <a:rPr sz="1150" b="0" i="0" lang="zh-CN" altLang="zh-CN">
                 <a:solidFill>
                   <a:srgbClr val="262626"/>
                 </a:solidFill>
                 <a:latin typeface="Microsoft YaHei"/>
                 <a:ea typeface="Microsoft YaHei"/>
+                <a:cs typeface="Microsoft YaHei"/>
               </a:rPr>
               <a:t>• bad case 闭环周期 14 天→2 天, 缩短 86%</a:t>
             </a:r>
@@ -6546,14 +6980,21 @@
               <a:lnSpc>
                 <a:spcPct val="125000"/>
               </a:lnSpc>
+              <a:spcBef>
+                <a:spcPts val="0"/>
+              </a:spcBef>
+              <a:spcAft>
+                <a:spcPts val="0"/>
+              </a:spcAft>
             </a:pPr>
             <a:r>
-              <a:rPr sz="1150" b="0" i="0">
+              <a:rPr sz="1150" b="0" i="0" lang="zh-CN" altLang="zh-CN">
                 <a:solidFill>
                   <a:srgbClr val="262626"/>
                 </a:solidFill>
                 <a:latin typeface="Microsoft YaHei"/>
                 <a:ea typeface="Microsoft YaHei"/>
+                <a:cs typeface="Microsoft YaHei"/>
               </a:rPr>
               <a:t>• 新领域冷启动样本成本下降 60%</a:t>
             </a:r>
@@ -6586,14 +7027,21 @@
               <a:lnSpc>
                 <a:spcPct val="112000"/>
               </a:lnSpc>
+              <a:spcBef>
+                <a:spcPts val="0"/>
+              </a:spcBef>
+              <a:spcAft>
+                <a:spcPts val="0"/>
+              </a:spcAft>
             </a:pPr>
             <a:r>
-              <a:rPr sz="1050" b="0" i="0">
+              <a:rPr sz="1050" b="0" i="0" lang="zh-CN" altLang="zh-CN">
                 <a:solidFill>
                   <a:srgbClr val="595959"/>
                 </a:solidFill>
                 <a:latin typeface="Microsoft YaHei"/>
                 <a:ea typeface="Microsoft YaHei"/>
+                <a:cs typeface="Microsoft YaHei"/>
               </a:rPr>
               <a:t>评测集准确率走势 (周度)</a:t>
             </a:r>
@@ -6856,7 +7304,14 @@
           <a:bodyPr rtlCol="0" anchor="ctr"/>
           <a:lstStyle/>
           <a:p>
-            <a:pPr algn="ctr"/>
+            <a:pPr algn="ctr">
+              <a:spcBef>
+                <a:spcPts val="0"/>
+              </a:spcBef>
+              <a:spcAft>
+                <a:spcPts val="0"/>
+              </a:spcAft>
+            </a:pPr>
           </a:p>
         </p:txBody>
       </p:sp>
@@ -6868,8 +7323,8 @@
         </p:nvSpPr>
         <p:spPr>
           <a:xfrm>
-            <a:off x="9144000" y="3240712"/>
-            <a:ext cx="304800" cy="127000"/>
+            <a:off x="9142412" y="3217915"/>
+            <a:ext cx="307975" cy="172593"/>
           </a:xfrm>
           <a:prstGeom prst="rect">
             <a:avLst/>
@@ -6886,14 +7341,21 @@
               <a:lnSpc>
                 <a:spcPct val="112000"/>
               </a:lnSpc>
+              <a:spcBef>
+                <a:spcPts val="0"/>
+              </a:spcBef>
+              <a:spcAft>
+                <a:spcPts val="0"/>
+              </a:spcAft>
             </a:pPr>
             <a:r>
-              <a:rPr sz="950" b="0" i="0">
+              <a:rPr sz="950" b="0" i="0" lang="zh-CN" altLang="zh-CN">
                 <a:solidFill>
                   <a:srgbClr val="262626"/>
                 </a:solidFill>
                 <a:latin typeface="Microsoft YaHei"/>
                 <a:ea typeface="Microsoft YaHei"/>
+                <a:cs typeface="Microsoft YaHei"/>
               </a:rPr>
               <a:t>62%</a:t>
             </a:r>
@@ -6908,8 +7370,8 @@
         </p:nvSpPr>
         <p:spPr>
           <a:xfrm>
-            <a:off x="9105900" y="4381500"/>
-            <a:ext cx="381000" cy="139700"/>
+            <a:off x="9105900" y="4365053"/>
+            <a:ext cx="381000" cy="172593"/>
           </a:xfrm>
           <a:prstGeom prst="rect">
             <a:avLst/>
@@ -6926,14 +7388,21 @@
               <a:lnSpc>
                 <a:spcPct val="112000"/>
               </a:lnSpc>
+              <a:spcBef>
+                <a:spcPts val="0"/>
+              </a:spcBef>
+              <a:spcAft>
+                <a:spcPts val="0"/>
+              </a:spcAft>
             </a:pPr>
             <a:r>
-              <a:rPr sz="950" b="0" i="0">
+              <a:rPr sz="950" b="0" i="0" lang="zh-CN" altLang="zh-CN">
                 <a:solidFill>
                   <a:srgbClr val="595959"/>
                 </a:solidFill>
                 <a:latin typeface="Microsoft YaHei"/>
                 <a:ea typeface="Microsoft YaHei"/>
+                <a:cs typeface="Microsoft YaHei"/>
               </a:rPr>
               <a:t>W1</a:t>
             </a:r>
@@ -6980,7 +7449,14 @@
           <a:bodyPr rtlCol="0" anchor="ctr"/>
           <a:lstStyle/>
           <a:p>
-            <a:pPr algn="ctr"/>
+            <a:pPr algn="ctr">
+              <a:spcBef>
+                <a:spcPts val="0"/>
+              </a:spcBef>
+              <a:spcAft>
+                <a:spcPts val="0"/>
+              </a:spcAft>
+            </a:pPr>
           </a:p>
         </p:txBody>
       </p:sp>
@@ -6992,8 +7468,8 @@
         </p:nvSpPr>
         <p:spPr>
           <a:xfrm>
-            <a:off x="9683750" y="3152436"/>
-            <a:ext cx="304800" cy="127000"/>
+            <a:off x="9682162" y="3129639"/>
+            <a:ext cx="307975" cy="172593"/>
           </a:xfrm>
           <a:prstGeom prst="rect">
             <a:avLst/>
@@ -7010,14 +7486,21 @@
               <a:lnSpc>
                 <a:spcPct val="112000"/>
               </a:lnSpc>
+              <a:spcBef>
+                <a:spcPts val="0"/>
+              </a:spcBef>
+              <a:spcAft>
+                <a:spcPts val="0"/>
+              </a:spcAft>
             </a:pPr>
             <a:r>
-              <a:rPr sz="950" b="0" i="0">
+              <a:rPr sz="950" b="0" i="0" lang="zh-CN" altLang="zh-CN">
                 <a:solidFill>
                   <a:srgbClr val="262626"/>
                 </a:solidFill>
                 <a:latin typeface="Microsoft YaHei"/>
                 <a:ea typeface="Microsoft YaHei"/>
+                <a:cs typeface="Microsoft YaHei"/>
               </a:rPr>
               <a:t>68%</a:t>
             </a:r>
@@ -7032,8 +7515,8 @@
         </p:nvSpPr>
         <p:spPr>
           <a:xfrm>
-            <a:off x="9645650" y="4381500"/>
-            <a:ext cx="381000" cy="139700"/>
+            <a:off x="9645650" y="4365053"/>
+            <a:ext cx="381000" cy="172593"/>
           </a:xfrm>
           <a:prstGeom prst="rect">
             <a:avLst/>
@@ -7050,14 +7533,21 @@
               <a:lnSpc>
                 <a:spcPct val="112000"/>
               </a:lnSpc>
+              <a:spcBef>
+                <a:spcPts val="0"/>
+              </a:spcBef>
+              <a:spcAft>
+                <a:spcPts val="0"/>
+              </a:spcAft>
             </a:pPr>
             <a:r>
-              <a:rPr sz="950" b="0" i="0">
+              <a:rPr sz="950" b="0" i="0" lang="zh-CN" altLang="zh-CN">
                 <a:solidFill>
                   <a:srgbClr val="595959"/>
                 </a:solidFill>
                 <a:latin typeface="Microsoft YaHei"/>
                 <a:ea typeface="Microsoft YaHei"/>
+                <a:cs typeface="Microsoft YaHei"/>
               </a:rPr>
               <a:t>W3</a:t>
             </a:r>
@@ -7104,7 +7594,14 @@
           <a:bodyPr rtlCol="0" anchor="ctr"/>
           <a:lstStyle/>
           <a:p>
-            <a:pPr algn="ctr"/>
+            <a:pPr algn="ctr">
+              <a:spcBef>
+                <a:spcPts val="0"/>
+              </a:spcBef>
+              <a:spcAft>
+                <a:spcPts val="0"/>
+              </a:spcAft>
+            </a:pPr>
           </a:p>
         </p:txBody>
       </p:sp>
@@ -7116,8 +7613,8 @@
         </p:nvSpPr>
         <p:spPr>
           <a:xfrm>
-            <a:off x="10223500" y="3064160"/>
-            <a:ext cx="304800" cy="127000"/>
+            <a:off x="10221912" y="3041363"/>
+            <a:ext cx="307975" cy="172593"/>
           </a:xfrm>
           <a:prstGeom prst="rect">
             <a:avLst/>
@@ -7134,14 +7631,21 @@
               <a:lnSpc>
                 <a:spcPct val="112000"/>
               </a:lnSpc>
+              <a:spcBef>
+                <a:spcPts val="0"/>
+              </a:spcBef>
+              <a:spcAft>
+                <a:spcPts val="0"/>
+              </a:spcAft>
             </a:pPr>
             <a:r>
-              <a:rPr sz="950" b="0" i="0">
+              <a:rPr sz="950" b="0" i="0" lang="zh-CN" altLang="zh-CN">
                 <a:solidFill>
                   <a:srgbClr val="262626"/>
                 </a:solidFill>
                 <a:latin typeface="Microsoft YaHei"/>
                 <a:ea typeface="Microsoft YaHei"/>
+                <a:cs typeface="Microsoft YaHei"/>
               </a:rPr>
               <a:t>74%</a:t>
             </a:r>
@@ -7156,8 +7660,8 @@
         </p:nvSpPr>
         <p:spPr>
           <a:xfrm>
-            <a:off x="10185400" y="4381500"/>
-            <a:ext cx="381000" cy="139700"/>
+            <a:off x="10185400" y="4365053"/>
+            <a:ext cx="381000" cy="172593"/>
           </a:xfrm>
           <a:prstGeom prst="rect">
             <a:avLst/>
@@ -7174,14 +7678,21 @@
               <a:lnSpc>
                 <a:spcPct val="112000"/>
               </a:lnSpc>
+              <a:spcBef>
+                <a:spcPts val="0"/>
+              </a:spcBef>
+              <a:spcAft>
+                <a:spcPts val="0"/>
+              </a:spcAft>
             </a:pPr>
             <a:r>
-              <a:rPr sz="950" b="0" i="0">
+              <a:rPr sz="950" b="0" i="0" lang="zh-CN" altLang="zh-CN">
                 <a:solidFill>
                   <a:srgbClr val="595959"/>
                 </a:solidFill>
                 <a:latin typeface="Microsoft YaHei"/>
                 <a:ea typeface="Microsoft YaHei"/>
+                <a:cs typeface="Microsoft YaHei"/>
               </a:rPr>
               <a:t>W5</a:t>
             </a:r>
@@ -7228,7 +7739,14 @@
           <a:bodyPr rtlCol="0" anchor="ctr"/>
           <a:lstStyle/>
           <a:p>
-            <a:pPr algn="ctr"/>
+            <a:pPr algn="ctr">
+              <a:spcBef>
+                <a:spcPts val="0"/>
+              </a:spcBef>
+              <a:spcAft>
+                <a:spcPts val="0"/>
+              </a:spcAft>
+            </a:pPr>
           </a:p>
         </p:txBody>
       </p:sp>
@@ -7240,8 +7758,8 @@
         </p:nvSpPr>
         <p:spPr>
           <a:xfrm>
-            <a:off x="10763250" y="2990596"/>
-            <a:ext cx="304800" cy="127000"/>
+            <a:off x="10761662" y="2967799"/>
+            <a:ext cx="307975" cy="172593"/>
           </a:xfrm>
           <a:prstGeom prst="rect">
             <a:avLst/>
@@ -7258,14 +7776,21 @@
               <a:lnSpc>
                 <a:spcPct val="112000"/>
               </a:lnSpc>
+              <a:spcBef>
+                <a:spcPts val="0"/>
+              </a:spcBef>
+              <a:spcAft>
+                <a:spcPts val="0"/>
+              </a:spcAft>
             </a:pPr>
             <a:r>
-              <a:rPr sz="950" b="0" i="0">
+              <a:rPr sz="950" b="0" i="0" lang="zh-CN" altLang="zh-CN">
                 <a:solidFill>
                   <a:srgbClr val="262626"/>
                 </a:solidFill>
                 <a:latin typeface="Microsoft YaHei"/>
                 <a:ea typeface="Microsoft YaHei"/>
+                <a:cs typeface="Microsoft YaHei"/>
               </a:rPr>
               <a:t>79%</a:t>
             </a:r>
@@ -7280,8 +7805,8 @@
         </p:nvSpPr>
         <p:spPr>
           <a:xfrm>
-            <a:off x="10725150" y="4381500"/>
-            <a:ext cx="381000" cy="139700"/>
+            <a:off x="10725150" y="4365053"/>
+            <a:ext cx="381000" cy="172593"/>
           </a:xfrm>
           <a:prstGeom prst="rect">
             <a:avLst/>
@@ -7298,14 +7823,21 @@
               <a:lnSpc>
                 <a:spcPct val="112000"/>
               </a:lnSpc>
+              <a:spcBef>
+                <a:spcPts val="0"/>
+              </a:spcBef>
+              <a:spcAft>
+                <a:spcPts val="0"/>
+              </a:spcAft>
             </a:pPr>
             <a:r>
-              <a:rPr sz="950" b="0" i="0">
+              <a:rPr sz="950" b="0" i="0" lang="zh-CN" altLang="zh-CN">
                 <a:solidFill>
                   <a:srgbClr val="595959"/>
                 </a:solidFill>
                 <a:latin typeface="Microsoft YaHei"/>
                 <a:ea typeface="Microsoft YaHei"/>
+                <a:cs typeface="Microsoft YaHei"/>
               </a:rPr>
               <a:t>W7</a:t>
             </a:r>
@@ -7352,7 +7884,14 @@
           <a:bodyPr rtlCol="0" anchor="ctr"/>
           <a:lstStyle/>
           <a:p>
-            <a:pPr algn="ctr"/>
+            <a:pPr algn="ctr">
+              <a:spcBef>
+                <a:spcPts val="0"/>
+              </a:spcBef>
+              <a:spcAft>
+                <a:spcPts val="0"/>
+              </a:spcAft>
+            </a:pPr>
           </a:p>
         </p:txBody>
       </p:sp>
@@ -7364,8 +7903,8 @@
         </p:nvSpPr>
         <p:spPr>
           <a:xfrm>
-            <a:off x="11303000" y="2931746"/>
-            <a:ext cx="304800" cy="127000"/>
+            <a:off x="11301412" y="2908949"/>
+            <a:ext cx="307975" cy="172593"/>
           </a:xfrm>
           <a:prstGeom prst="rect">
             <a:avLst/>
@@ -7382,14 +7921,21 @@
               <a:lnSpc>
                 <a:spcPct val="112000"/>
               </a:lnSpc>
+              <a:spcBef>
+                <a:spcPts val="0"/>
+              </a:spcBef>
+              <a:spcAft>
+                <a:spcPts val="0"/>
+              </a:spcAft>
             </a:pPr>
             <a:r>
-              <a:rPr sz="950" b="0" i="0">
+              <a:rPr sz="950" b="0" i="0" lang="zh-CN" altLang="zh-CN">
                 <a:solidFill>
                   <a:srgbClr val="262626"/>
                 </a:solidFill>
                 <a:latin typeface="Microsoft YaHei"/>
                 <a:ea typeface="Microsoft YaHei"/>
+                <a:cs typeface="Microsoft YaHei"/>
               </a:rPr>
               <a:t>83%</a:t>
             </a:r>
@@ -7404,8 +7950,8 @@
         </p:nvSpPr>
         <p:spPr>
           <a:xfrm>
-            <a:off x="11264900" y="4381500"/>
-            <a:ext cx="381000" cy="139700"/>
+            <a:off x="11264900" y="4365053"/>
+            <a:ext cx="381000" cy="172593"/>
           </a:xfrm>
           <a:prstGeom prst="rect">
             <a:avLst/>
@@ -7422,14 +7968,21 @@
               <a:lnSpc>
                 <a:spcPct val="112000"/>
               </a:lnSpc>
+              <a:spcBef>
+                <a:spcPts val="0"/>
+              </a:spcBef>
+              <a:spcAft>
+                <a:spcPts val="0"/>
+              </a:spcAft>
             </a:pPr>
             <a:r>
-              <a:rPr sz="950" b="0" i="0">
+              <a:rPr sz="950" b="0" i="0" lang="zh-CN" altLang="zh-CN">
                 <a:solidFill>
                   <a:srgbClr val="595959"/>
                 </a:solidFill>
                 <a:latin typeface="Microsoft YaHei"/>
                 <a:ea typeface="Microsoft YaHei"/>
+                <a:cs typeface="Microsoft YaHei"/>
               </a:rPr>
               <a:t>W9</a:t>
             </a:r>
@@ -7476,7 +8029,14 @@
           <a:bodyPr rtlCol="0" anchor="ctr"/>
           <a:lstStyle/>
           <a:p>
-            <a:pPr algn="ctr"/>
+            <a:pPr algn="ctr">
+              <a:spcBef>
+                <a:spcPts val="0"/>
+              </a:spcBef>
+              <a:spcAft>
+                <a:spcPts val="0"/>
+              </a:spcAft>
+            </a:pPr>
           </a:p>
         </p:txBody>
       </p:sp>
@@ -7520,7 +8080,14 @@
           <a:bodyPr rtlCol="0" anchor="ctr"/>
           <a:lstStyle/>
           <a:p>
-            <a:pPr algn="ctr"/>
+            <a:pPr algn="ctr">
+              <a:spcBef>
+                <a:spcPts val="0"/>
+              </a:spcBef>
+              <a:spcAft>
+                <a:spcPts val="0"/>
+              </a:spcAft>
+            </a:pPr>
           </a:p>
         </p:txBody>
       </p:sp>
@@ -7550,14 +8117,21 @@
               <a:lnSpc>
                 <a:spcPct val="112000"/>
               </a:lnSpc>
+              <a:spcBef>
+                <a:spcPts val="0"/>
+              </a:spcBef>
+              <a:spcAft>
+                <a:spcPts val="0"/>
+              </a:spcAft>
             </a:pPr>
             <a:r>
-              <a:rPr sz="1400" b="1" i="0">
+              <a:rPr sz="1400" b="1" i="0" lang="zh-CN" altLang="zh-CN">
                 <a:solidFill>
                   <a:srgbClr val="262626"/>
                 </a:solidFill>
                 <a:latin typeface="Microsoft YaHei"/>
                 <a:ea typeface="Microsoft YaHei"/>
+                <a:cs typeface="Microsoft YaHei"/>
               </a:rPr>
               <a:t>北极星指标</a:t>
             </a:r>
@@ -7604,7 +8178,14 @@
           <a:bodyPr rtlCol="0" anchor="ctr"/>
           <a:lstStyle/>
           <a:p>
-            <a:pPr algn="ctr"/>
+            <a:pPr algn="ctr">
+              <a:spcBef>
+                <a:spcPts val="0"/>
+              </a:spcBef>
+              <a:spcAft>
+                <a:spcPts val="0"/>
+              </a:spcAft>
+            </a:pPr>
           </a:p>
         </p:txBody>
       </p:sp>
@@ -7634,14 +8215,21 @@
               <a:lnSpc>
                 <a:spcPct val="112000"/>
               </a:lnSpc>
+              <a:spcBef>
+                <a:spcPts val="0"/>
+              </a:spcBef>
+              <a:spcAft>
+                <a:spcPts val="0"/>
+              </a:spcAft>
             </a:pPr>
             <a:r>
-              <a:rPr sz="1300" b="1" i="0">
+              <a:rPr sz="1300" b="1" i="0" lang="zh-CN" altLang="zh-CN">
                 <a:solidFill>
                   <a:srgbClr val="262626"/>
                 </a:solidFill>
                 <a:latin typeface="Microsoft YaHei"/>
                 <a:ea typeface="Microsoft YaHei"/>
+                <a:cs typeface="Microsoft YaHei"/>
               </a:rPr>
               <a:t>评测准确率 83.4%, 环比 +12pp</a:t>
             </a:r>
@@ -7674,14 +8262,21 @@
               <a:lnSpc>
                 <a:spcPct val="112000"/>
               </a:lnSpc>
+              <a:spcBef>
+                <a:spcPts val="0"/>
+              </a:spcBef>
+              <a:spcAft>
+                <a:spcPts val="0"/>
+              </a:spcAft>
             </a:pPr>
             <a:r>
-              <a:rPr sz="950" b="0" i="0">
+              <a:rPr sz="950" b="0" i="0" lang="zh-CN" altLang="zh-CN">
                 <a:solidFill>
                   <a:srgbClr val="595959"/>
                 </a:solidFill>
                 <a:latin typeface="Microsoft YaHei"/>
                 <a:ea typeface="Microsoft YaHei"/>
+                <a:cs typeface="Microsoft YaHei"/>
               </a:rPr>
               <a:t>口径: 盘古评测集 v3.2 周度滚动均值</a:t>
             </a:r>
@@ -7691,14 +8286,21 @@
               <a:lnSpc>
                 <a:spcPct val="112000"/>
               </a:lnSpc>
+              <a:spcBef>
+                <a:spcPts val="0"/>
+              </a:spcBef>
+              <a:spcAft>
+                <a:spcPts val="0"/>
+              </a:spcAft>
             </a:pPr>
             <a:r>
-              <a:rPr sz="950" b="0" i="0">
+              <a:rPr sz="950" b="0" i="0" lang="zh-CN" altLang="zh-CN">
                 <a:solidFill>
                   <a:srgbClr val="595959"/>
                 </a:solidFill>
                 <a:latin typeface="Microsoft YaHei"/>
                 <a:ea typeface="Microsoft YaHei"/>
+                <a:cs typeface="Microsoft YaHei"/>
               </a:rPr>
               <a:t>飞轮自 2025Q4 起全量接管数据生产</a:t>
             </a:r>
